--- a/docs/deck.pptx
+++ b/docs/deck.pptx
@@ -3137,7 +3137,7 @@
                 </a:solidFill>
                 <a:latin typeface="IBM Plex Mono"/>
               </a:rPr>
-              <a:t>AI FOR PAKISTAN FUTURE</a:t>
+              <a:t>BANO QABIL AI HACKATHON</a:t>
             </a:r>
           </a:p>
         </p:txBody>
@@ -3321,7 +3321,7 @@
                 </a:solidFill>
                 <a:latin typeface="IBM Plex Mono"/>
               </a:rPr>
-              <a:t>Alibaba Cloud hackathon · LightGBM + SHAP + Qwen</a:t>
+              <a:t>Mirza Ahsan Baig and Safee · LightGBM + SHAP + Qwen on DashScope</a:t>
             </a:r>
           </a:p>
         </p:txBody>

--- a/docs/deck.pptx
+++ b/docs/deck.pptx
@@ -13,6 +13,7 @@
     <p:sldId id="261" r:id="rId12"/>
     <p:sldId id="262" r:id="rId13"/>
     <p:sldId id="263" r:id="rId14"/>
+    <p:sldId id="264" r:id="rId15"/>
   </p:sldIdLst>
   <p:sldSz cx="12191695" cy="6858000" type="screen4x3"/>
   <p:notesSz cx="6858000" cy="9144000"/>
@@ -4640,7 +4641,7 @@
                 </a:solidFill>
                 <a:latin typeface="IBM Plex Mono"/>
               </a:rPr>
-              <a:t>RESULTS</a:t>
+              <a:t>THE INTERFACE</a:t>
             </a:r>
           </a:p>
         </p:txBody>
@@ -4679,7 +4680,7 @@
                 </a:solidFill>
                 <a:latin typeface="Newsreader"/>
               </a:rPr>
-              <a:t>Deliberately not perfect</a:t>
+              <a:t>The estimate is never hidden</a:t>
             </a:r>
           </a:p>
         </p:txBody>
@@ -4753,7 +4754,7 @@
                 </a:solidFill>
                 <a:latin typeface="IBM Plex Sans"/>
               </a:rPr>
-              <a:t>Only 26.5% of claims are rejected, so blindly approving everything</a:t>
+              <a:t>The running probability is on screen from the first question, so there</a:t>
             </a:r>
           </a:p>
           <a:p>
@@ -4769,7 +4770,7 @@
                 </a:solidFill>
                 <a:latin typeface="IBM Plex Sans"/>
               </a:rPr>
-              <a:t>already scores 73.5%. Accuracy is the wrong headline — AUC and recall</a:t>
+              <a:t>is no reveal to wait for. Every answer is scored against the reading</a:t>
             </a:r>
           </a:p>
           <a:p>
@@ -4785,15 +4786,8 @@
                 </a:solidFill>
                 <a:latin typeface="IBM Plex Sans"/>
               </a:rPr>
-              <a:t>are the meaningful numbers.</a:t>
-            </a:r>
-          </a:p>
-          <a:p>
-            <a:pPr>
-              <a:spcAft>
-                <a:spcPts val="300"/>
-              </a:spcAft>
-            </a:pPr>
+              <a:t>immediately before it — a field that hurts the claim is flagged while</a:t>
+            </a:r>
           </a:p>
           <a:p>
             <a:pPr>
@@ -4808,8 +4802,15 @@
                 </a:solidFill>
                 <a:latin typeface="IBM Plex Sans"/>
               </a:rPr>
-              <a:t>Per-code accuracy is highest where it matters: 92% on CARC 197,</a:t>
-            </a:r>
+              <a:t>staff can still correct it, not in the verdict when they cannot.</a:t>
+            </a:r>
+          </a:p>
+          <a:p>
+            <a:pPr>
+              <a:spcAft>
+                <a:spcPts val="300"/>
+              </a:spcAft>
+            </a:pPr>
           </a:p>
           <a:p>
             <a:pPr>
@@ -4824,7 +4825,94 @@
                 </a:solidFill>
                 <a:latin typeface="IBM Plex Sans"/>
               </a:rPr>
-              <a:t>pre-authorisation absent.</a:t>
+              <a:t>     "Supporting documents: Some missing — this raised the</a:t>
+            </a:r>
+          </a:p>
+          <a:p>
+            <a:pPr>
+              <a:spcAft>
+                <a:spcPts val="300"/>
+              </a:spcAft>
+            </a:pPr>
+            <a:r>
+              <a:rPr sz="1500">
+                <a:solidFill>
+                  <a:srgbClr val="4A463B"/>
+                </a:solidFill>
+                <a:latin typeface="IBM Plex Sans"/>
+              </a:rPr>
+              <a:t>      estimate by 17 points."</a:t>
+            </a:r>
+          </a:p>
+          <a:p>
+            <a:pPr>
+              <a:spcAft>
+                <a:spcPts val="300"/>
+              </a:spcAft>
+            </a:pPr>
+          </a:p>
+          <a:p>
+            <a:pPr>
+              <a:spcAft>
+                <a:spcPts val="300"/>
+              </a:spcAft>
+            </a:pPr>
+            <a:r>
+              <a:rPr sz="1500">
+                <a:solidFill>
+                  <a:srgbClr val="4A463B"/>
+                </a:solidFill>
+                <a:latin typeface="IBM Plex Sans"/>
+              </a:rPr>
+              <a:t>SHAP attribution, the CARC citation and Qwen's plain-language reading</a:t>
+            </a:r>
+          </a:p>
+          <a:p>
+            <a:pPr>
+              <a:spcAft>
+                <a:spcPts val="300"/>
+              </a:spcAft>
+            </a:pPr>
+            <a:r>
+              <a:rPr sz="1500">
+                <a:solidFill>
+                  <a:srgbClr val="4A463B"/>
+                </a:solidFill>
+                <a:latin typeface="IBM Plex Sans"/>
+              </a:rPr>
+              <a:t>sit alongside it. No rejection reason is shown for a clean claim: the</a:t>
+            </a:r>
+          </a:p>
+          <a:p>
+            <a:pPr>
+              <a:spcAft>
+                <a:spcPts val="300"/>
+              </a:spcAft>
+            </a:pPr>
+            <a:r>
+              <a:rPr sz="1500">
+                <a:solidFill>
+                  <a:srgbClr val="4A463B"/>
+                </a:solidFill>
+                <a:latin typeface="IBM Plex Sans"/>
+              </a:rPr>
+              <a:t>reason model trains only on rejected claims, so naming one would be</a:t>
+            </a:r>
+          </a:p>
+          <a:p>
+            <a:pPr>
+              <a:spcAft>
+                <a:spcPts val="300"/>
+              </a:spcAft>
+            </a:pPr>
+            <a:r>
+              <a:rPr sz="1500">
+                <a:solidFill>
+                  <a:srgbClr val="4A463B"/>
+                </a:solidFill>
+                <a:latin typeface="IBM Plex Sans"/>
+              </a:rPr>
+              <a:t>inventing a problem.</a:t>
             </a:r>
           </a:p>
         </p:txBody>
@@ -4837,8 +4925,8 @@
         </p:nvSpPr>
         <p:spPr>
           <a:xfrm>
-            <a:off x="8229600" y="2377440"/>
-            <a:ext cx="3108960" cy="640080"/>
+            <a:off x="822960" y="6035040"/>
+            <a:ext cx="10515600" cy="365760"/>
           </a:xfrm>
           <a:prstGeom prst="rect">
             <a:avLst/>
@@ -4857,13 +4945,13 @@
               </a:spcAft>
             </a:pPr>
             <a:r>
-              <a:rPr sz="3400" b="0">
-                <a:solidFill>
-                  <a:srgbClr val="1F4B43"/>
-                </a:solidFill>
-                <a:latin typeface="Newsreader"/>
-              </a:rPr>
-              <a:t>0.788</a:t>
+              <a:rPr sz="1100" b="0">
+                <a:solidFill>
+                  <a:srgbClr val="7D7767"/>
+                </a:solidFill>
+                <a:latin typeface="IBM Plex Mono"/>
+              </a:rPr>
+              <a:t>Built for clinic admin staff — CARC, SHAP and information gain each carry a definition</a:t>
             </a:r>
           </a:p>
         </p:txBody>
@@ -4871,240 +4959,6 @@
       <p:sp>
         <p:nvSpPr>
           <p:cNvPr id="7" name="TextBox 6"/>
-          <p:cNvSpPr txBox="1"/>
-          <p:nvPr/>
-        </p:nvSpPr>
-        <p:spPr>
-          <a:xfrm>
-            <a:off x="8275320" y="2944368"/>
-            <a:ext cx="3108960" cy="365760"/>
-          </a:xfrm>
-          <a:prstGeom prst="rect">
-            <a:avLst/>
-          </a:prstGeom>
-          <a:noFill/>
-        </p:spPr>
-        <p:txBody>
-          <a:bodyPr wrap="none">
-            <a:spAutoFit/>
-          </a:bodyPr>
-          <a:lstStyle/>
-          <a:p>
-            <a:pPr algn="l">
-              <a:spcAft>
-                <a:spcPts val="0"/>
-              </a:spcAft>
-            </a:pPr>
-            <a:r>
-              <a:rPr sz="1100" b="0">
-                <a:solidFill>
-                  <a:srgbClr val="7D7767"/>
-                </a:solidFill>
-                <a:latin typeface="IBM Plex Mono"/>
-              </a:rPr>
-              <a:t>ROC AUC</a:t>
-            </a:r>
-          </a:p>
-        </p:txBody>
-      </p:sp>
-      <p:sp>
-        <p:nvSpPr>
-          <p:cNvPr id="8" name="TextBox 7"/>
-          <p:cNvSpPr txBox="1"/>
-          <p:nvPr/>
-        </p:nvSpPr>
-        <p:spPr>
-          <a:xfrm>
-            <a:off x="8229600" y="3611880"/>
-            <a:ext cx="3108960" cy="640080"/>
-          </a:xfrm>
-          <a:prstGeom prst="rect">
-            <a:avLst/>
-          </a:prstGeom>
-          <a:noFill/>
-        </p:spPr>
-        <p:txBody>
-          <a:bodyPr wrap="none">
-            <a:spAutoFit/>
-          </a:bodyPr>
-          <a:lstStyle/>
-          <a:p>
-            <a:pPr algn="l">
-              <a:spcAft>
-                <a:spcPts val="0"/>
-              </a:spcAft>
-            </a:pPr>
-            <a:r>
-              <a:rPr sz="3400" b="0">
-                <a:solidFill>
-                  <a:srgbClr val="1F4B43"/>
-                </a:solidFill>
-                <a:latin typeface="Newsreader"/>
-              </a:rPr>
-              <a:t>67.7%</a:t>
-            </a:r>
-          </a:p>
-        </p:txBody>
-      </p:sp>
-      <p:sp>
-        <p:nvSpPr>
-          <p:cNvPr id="9" name="TextBox 8"/>
-          <p:cNvSpPr txBox="1"/>
-          <p:nvPr/>
-        </p:nvSpPr>
-        <p:spPr>
-          <a:xfrm>
-            <a:off x="8275320" y="4178808"/>
-            <a:ext cx="3108960" cy="365760"/>
-          </a:xfrm>
-          <a:prstGeom prst="rect">
-            <a:avLst/>
-          </a:prstGeom>
-          <a:noFill/>
-        </p:spPr>
-        <p:txBody>
-          <a:bodyPr wrap="none">
-            <a:spAutoFit/>
-          </a:bodyPr>
-          <a:lstStyle/>
-          <a:p>
-            <a:pPr algn="l">
-              <a:spcAft>
-                <a:spcPts val="0"/>
-              </a:spcAft>
-            </a:pPr>
-            <a:r>
-              <a:rPr sz="1100" b="0">
-                <a:solidFill>
-                  <a:srgbClr val="7D7767"/>
-                </a:solidFill>
-                <a:latin typeface="IBM Plex Mono"/>
-              </a:rPr>
-              <a:t>recall</a:t>
-            </a:r>
-          </a:p>
-        </p:txBody>
-      </p:sp>
-      <p:sp>
-        <p:nvSpPr>
-          <p:cNvPr id="10" name="TextBox 9"/>
-          <p:cNvSpPr txBox="1"/>
-          <p:nvPr/>
-        </p:nvSpPr>
-        <p:spPr>
-          <a:xfrm>
-            <a:off x="8229600" y="4846320"/>
-            <a:ext cx="3108960" cy="640080"/>
-          </a:xfrm>
-          <a:prstGeom prst="rect">
-            <a:avLst/>
-          </a:prstGeom>
-          <a:noFill/>
-        </p:spPr>
-        <p:txBody>
-          <a:bodyPr wrap="none">
-            <a:spAutoFit/>
-          </a:bodyPr>
-          <a:lstStyle/>
-          <a:p>
-            <a:pPr algn="l">
-              <a:spcAft>
-                <a:spcPts val="0"/>
-              </a:spcAft>
-            </a:pPr>
-            <a:r>
-              <a:rPr sz="3400" b="0">
-                <a:solidFill>
-                  <a:srgbClr val="1F4B43"/>
-                </a:solidFill>
-                <a:latin typeface="Newsreader"/>
-              </a:rPr>
-              <a:t>68 / 80%</a:t>
-            </a:r>
-          </a:p>
-        </p:txBody>
-      </p:sp>
-      <p:sp>
-        <p:nvSpPr>
-          <p:cNvPr id="11" name="TextBox 10"/>
-          <p:cNvSpPr txBox="1"/>
-          <p:nvPr/>
-        </p:nvSpPr>
-        <p:spPr>
-          <a:xfrm>
-            <a:off x="8275320" y="5413248"/>
-            <a:ext cx="3108960" cy="365760"/>
-          </a:xfrm>
-          <a:prstGeom prst="rect">
-            <a:avLst/>
-          </a:prstGeom>
-          <a:noFill/>
-        </p:spPr>
-        <p:txBody>
-          <a:bodyPr wrap="none">
-            <a:spAutoFit/>
-          </a:bodyPr>
-          <a:lstStyle/>
-          <a:p>
-            <a:pPr algn="l">
-              <a:spcAft>
-                <a:spcPts val="0"/>
-              </a:spcAft>
-            </a:pPr>
-            <a:r>
-              <a:rPr sz="1100" b="0">
-                <a:solidFill>
-                  <a:srgbClr val="7D7767"/>
-                </a:solidFill>
-                <a:latin typeface="IBM Plex Mono"/>
-              </a:rPr>
-              <a:t>CARC top-1 / top-3</a:t>
-            </a:r>
-          </a:p>
-        </p:txBody>
-      </p:sp>
-      <p:sp>
-        <p:nvSpPr>
-          <p:cNvPr id="12" name="TextBox 11"/>
-          <p:cNvSpPr txBox="1"/>
-          <p:nvPr/>
-        </p:nvSpPr>
-        <p:spPr>
-          <a:xfrm>
-            <a:off x="822960" y="6035040"/>
-            <a:ext cx="10515600" cy="365760"/>
-          </a:xfrm>
-          <a:prstGeom prst="rect">
-            <a:avLst/>
-          </a:prstGeom>
-          <a:noFill/>
-        </p:spPr>
-        <p:txBody>
-          <a:bodyPr wrap="none">
-            <a:spAutoFit/>
-          </a:bodyPr>
-          <a:lstStyle/>
-          <a:p>
-            <a:pPr algn="l">
-              <a:spcAft>
-                <a:spcPts val="0"/>
-              </a:spcAft>
-            </a:pPr>
-            <a:r>
-              <a:rPr sz="1100" b="0">
-                <a:solidFill>
-                  <a:srgbClr val="7D7767"/>
-                </a:solidFill>
-                <a:latin typeface="IBM Plex Mono"/>
-              </a:rPr>
-              <a:t>Held at 77.9% accuracy on purpose — see next slide</a:t>
-            </a:r>
-          </a:p>
-        </p:txBody>
-      </p:sp>
-      <p:sp>
-        <p:nvSpPr>
-          <p:cNvPr id="13" name="TextBox 12"/>
           <p:cNvSpPr txBox="1"/>
           <p:nvPr/>
         </p:nvSpPr>
@@ -5201,7 +5055,7 @@
                 </a:solidFill>
                 <a:latin typeface="IBM Plex Mono"/>
               </a:rPr>
-              <a:t>THE DATA</a:t>
+              <a:t>RESULTS</a:t>
             </a:r>
           </a:p>
         </p:txBody>
@@ -5240,7 +5094,7 @@
                 </a:solidFill>
                 <a:latin typeface="Newsreader"/>
               </a:rPr>
-              <a:t>No, the data is not real. It cannot be.</a:t>
+              <a:t>Deliberately not perfect</a:t>
             </a:r>
           </a:p>
         </p:txBody>
@@ -5314,7 +5168,7 @@
                 </a:solidFill>
                 <a:latin typeface="IBM Plex Sans"/>
               </a:rPr>
-              <a:t>No public dataset exists anywhere of real clinic claims paired with</a:t>
+              <a:t>Only 26.5% of claims are rejected, so blindly approving everything</a:t>
             </a:r>
           </a:p>
           <a:p>
@@ -5330,7 +5184,7 @@
                 </a:solidFill>
                 <a:latin typeface="IBM Plex Sans"/>
               </a:rPr>
-              <a:t>their outcomes. Insurers treat that as private business information.</a:t>
+              <a:t>already scores 73.5%. Accuracy is the wrong headline — AUC and recall</a:t>
             </a:r>
           </a:p>
           <a:p>
@@ -5346,7 +5200,7 @@
                 </a:solidFill>
                 <a:latin typeface="IBM Plex Sans"/>
               </a:rPr>
-              <a:t>Every commercial product here trains on its own private history.</a:t>
+              <a:t>are the meaningful numbers.</a:t>
             </a:r>
           </a:p>
           <a:p>
@@ -5369,7 +5223,7 @@
                 </a:solidFill>
                 <a:latin typeface="IBM Plex Sans"/>
               </a:rPr>
-              <a:t>So we built ours from two real pieces:</a:t>
+              <a:t>Per-code accuracy is highest where it matters: 92% on CARC 197,</a:t>
             </a:r>
           </a:p>
           <a:p>
@@ -5385,78 +5239,7 @@
                 </a:solidFill>
                 <a:latin typeface="IBM Plex Sans"/>
               </a:rPr>
-              <a:t>     Synthea — open clinical simulator, real SNOMED CT codes</a:t>
-            </a:r>
-          </a:p>
-          <a:p>
-            <a:pPr>
-              <a:spcAft>
-                <a:spcPts val="300"/>
-              </a:spcAft>
-            </a:pPr>
-            <a:r>
-              <a:rPr sz="1500">
-                <a:solidFill>
-                  <a:srgbClr val="4A463B"/>
-                </a:solidFill>
-                <a:latin typeface="IBM Plex Sans"/>
-              </a:rPr>
-              <a:t>     X12 CARC — the real industry rejection-reason standard</a:t>
-            </a:r>
-          </a:p>
-          <a:p>
-            <a:pPr>
-              <a:spcAft>
-                <a:spcPts val="300"/>
-              </a:spcAft>
-            </a:pPr>
-          </a:p>
-          <a:p>
-            <a:pPr>
-              <a:spcAft>
-                <a:spcPts val="300"/>
-              </a:spcAft>
-            </a:pPr>
-            <a:r>
-              <a:rPr sz="1500">
-                <a:solidFill>
-                  <a:srgbClr val="4A463B"/>
-                </a:solidFill>
-                <a:latin typeface="IBM Plex Sans"/>
-              </a:rPr>
-              <a:t>Only the labelling logic is ours, and we documented exactly where</a:t>
-            </a:r>
-          </a:p>
-          <a:p>
-            <a:pPr>
-              <a:spcAft>
-                <a:spcPts val="300"/>
-              </a:spcAft>
-            </a:pPr>
-            <a:r>
-              <a:rPr sz="1500">
-                <a:solidFill>
-                  <a:srgbClr val="4A463B"/>
-                </a:solidFill>
-                <a:latin typeface="IBM Plex Sans"/>
-              </a:rPr>
-              <a:t>that line falls. A near-perfect score on self-generated data would</a:t>
-            </a:r>
-          </a:p>
-          <a:p>
-            <a:pPr>
-              <a:spcAft>
-                <a:spcPts val="300"/>
-              </a:spcAft>
-            </a:pPr>
-            <a:r>
-              <a:rPr sz="1500">
-                <a:solidFill>
-                  <a:srgbClr val="4A463B"/>
-                </a:solidFill>
-                <a:latin typeface="IBM Plex Sans"/>
-              </a:rPr>
-              <a:t>only prove the model memorised our own rules.</a:t>
+              <a:t>pre-authorisation absent.</a:t>
             </a:r>
           </a:p>
         </p:txBody>
@@ -5469,8 +5252,8 @@
         </p:nvSpPr>
         <p:spPr>
           <a:xfrm>
-            <a:off x="822960" y="6035040"/>
-            <a:ext cx="10515600" cy="365760"/>
+            <a:off x="8229600" y="2377440"/>
+            <a:ext cx="3108960" cy="640080"/>
           </a:xfrm>
           <a:prstGeom prst="rect">
             <a:avLst/>
@@ -5489,20 +5272,254 @@
               </a:spcAft>
             </a:pPr>
             <a:r>
+              <a:rPr sz="3400" b="0">
+                <a:solidFill>
+                  <a:srgbClr val="1F4B43"/>
+                </a:solidFill>
+                <a:latin typeface="Newsreader"/>
+              </a:rPr>
+              <a:t>0.788</a:t>
+            </a:r>
+          </a:p>
+        </p:txBody>
+      </p:sp>
+      <p:sp>
+        <p:nvSpPr>
+          <p:cNvPr id="7" name="TextBox 6"/>
+          <p:cNvSpPr txBox="1"/>
+          <p:nvPr/>
+        </p:nvSpPr>
+        <p:spPr>
+          <a:xfrm>
+            <a:off x="8275320" y="2944368"/>
+            <a:ext cx="3108960" cy="365760"/>
+          </a:xfrm>
+          <a:prstGeom prst="rect">
+            <a:avLst/>
+          </a:prstGeom>
+          <a:noFill/>
+        </p:spPr>
+        <p:txBody>
+          <a:bodyPr wrap="none">
+            <a:spAutoFit/>
+          </a:bodyPr>
+          <a:lstStyle/>
+          <a:p>
+            <a:pPr algn="l">
+              <a:spcAft>
+                <a:spcPts val="0"/>
+              </a:spcAft>
+            </a:pPr>
+            <a:r>
               <a:rPr sz="1100" b="0">
                 <a:solidFill>
                   <a:srgbClr val="7D7767"/>
                 </a:solidFill>
                 <a:latin typeface="IBM Plex Mono"/>
               </a:rPr>
-              <a:t>docs/data-provenance.md · docs/model-card.md</a:t>
-            </a:r>
-          </a:p>
-        </p:txBody>
-      </p:sp>
-      <p:sp>
-        <p:nvSpPr>
-          <p:cNvPr id="7" name="TextBox 6"/>
+              <a:t>ROC AUC</a:t>
+            </a:r>
+          </a:p>
+        </p:txBody>
+      </p:sp>
+      <p:sp>
+        <p:nvSpPr>
+          <p:cNvPr id="8" name="TextBox 7"/>
+          <p:cNvSpPr txBox="1"/>
+          <p:nvPr/>
+        </p:nvSpPr>
+        <p:spPr>
+          <a:xfrm>
+            <a:off x="8229600" y="3611880"/>
+            <a:ext cx="3108960" cy="640080"/>
+          </a:xfrm>
+          <a:prstGeom prst="rect">
+            <a:avLst/>
+          </a:prstGeom>
+          <a:noFill/>
+        </p:spPr>
+        <p:txBody>
+          <a:bodyPr wrap="none">
+            <a:spAutoFit/>
+          </a:bodyPr>
+          <a:lstStyle/>
+          <a:p>
+            <a:pPr algn="l">
+              <a:spcAft>
+                <a:spcPts val="0"/>
+              </a:spcAft>
+            </a:pPr>
+            <a:r>
+              <a:rPr sz="3400" b="0">
+                <a:solidFill>
+                  <a:srgbClr val="1F4B43"/>
+                </a:solidFill>
+                <a:latin typeface="Newsreader"/>
+              </a:rPr>
+              <a:t>67.7%</a:t>
+            </a:r>
+          </a:p>
+        </p:txBody>
+      </p:sp>
+      <p:sp>
+        <p:nvSpPr>
+          <p:cNvPr id="9" name="TextBox 8"/>
+          <p:cNvSpPr txBox="1"/>
+          <p:nvPr/>
+        </p:nvSpPr>
+        <p:spPr>
+          <a:xfrm>
+            <a:off x="8275320" y="4178808"/>
+            <a:ext cx="3108960" cy="365760"/>
+          </a:xfrm>
+          <a:prstGeom prst="rect">
+            <a:avLst/>
+          </a:prstGeom>
+          <a:noFill/>
+        </p:spPr>
+        <p:txBody>
+          <a:bodyPr wrap="none">
+            <a:spAutoFit/>
+          </a:bodyPr>
+          <a:lstStyle/>
+          <a:p>
+            <a:pPr algn="l">
+              <a:spcAft>
+                <a:spcPts val="0"/>
+              </a:spcAft>
+            </a:pPr>
+            <a:r>
+              <a:rPr sz="1100" b="0">
+                <a:solidFill>
+                  <a:srgbClr val="7D7767"/>
+                </a:solidFill>
+                <a:latin typeface="IBM Plex Mono"/>
+              </a:rPr>
+              <a:t>recall</a:t>
+            </a:r>
+          </a:p>
+        </p:txBody>
+      </p:sp>
+      <p:sp>
+        <p:nvSpPr>
+          <p:cNvPr id="10" name="TextBox 9"/>
+          <p:cNvSpPr txBox="1"/>
+          <p:nvPr/>
+        </p:nvSpPr>
+        <p:spPr>
+          <a:xfrm>
+            <a:off x="8229600" y="4846320"/>
+            <a:ext cx="3108960" cy="640080"/>
+          </a:xfrm>
+          <a:prstGeom prst="rect">
+            <a:avLst/>
+          </a:prstGeom>
+          <a:noFill/>
+        </p:spPr>
+        <p:txBody>
+          <a:bodyPr wrap="none">
+            <a:spAutoFit/>
+          </a:bodyPr>
+          <a:lstStyle/>
+          <a:p>
+            <a:pPr algn="l">
+              <a:spcAft>
+                <a:spcPts val="0"/>
+              </a:spcAft>
+            </a:pPr>
+            <a:r>
+              <a:rPr sz="3400" b="0">
+                <a:solidFill>
+                  <a:srgbClr val="1F4B43"/>
+                </a:solidFill>
+                <a:latin typeface="Newsreader"/>
+              </a:rPr>
+              <a:t>68 / 80%</a:t>
+            </a:r>
+          </a:p>
+        </p:txBody>
+      </p:sp>
+      <p:sp>
+        <p:nvSpPr>
+          <p:cNvPr id="11" name="TextBox 10"/>
+          <p:cNvSpPr txBox="1"/>
+          <p:nvPr/>
+        </p:nvSpPr>
+        <p:spPr>
+          <a:xfrm>
+            <a:off x="8275320" y="5413248"/>
+            <a:ext cx="3108960" cy="365760"/>
+          </a:xfrm>
+          <a:prstGeom prst="rect">
+            <a:avLst/>
+          </a:prstGeom>
+          <a:noFill/>
+        </p:spPr>
+        <p:txBody>
+          <a:bodyPr wrap="none">
+            <a:spAutoFit/>
+          </a:bodyPr>
+          <a:lstStyle/>
+          <a:p>
+            <a:pPr algn="l">
+              <a:spcAft>
+                <a:spcPts val="0"/>
+              </a:spcAft>
+            </a:pPr>
+            <a:r>
+              <a:rPr sz="1100" b="0">
+                <a:solidFill>
+                  <a:srgbClr val="7D7767"/>
+                </a:solidFill>
+                <a:latin typeface="IBM Plex Mono"/>
+              </a:rPr>
+              <a:t>CARC top-1 / top-3</a:t>
+            </a:r>
+          </a:p>
+        </p:txBody>
+      </p:sp>
+      <p:sp>
+        <p:nvSpPr>
+          <p:cNvPr id="12" name="TextBox 11"/>
+          <p:cNvSpPr txBox="1"/>
+          <p:nvPr/>
+        </p:nvSpPr>
+        <p:spPr>
+          <a:xfrm>
+            <a:off x="822960" y="6035040"/>
+            <a:ext cx="10515600" cy="365760"/>
+          </a:xfrm>
+          <a:prstGeom prst="rect">
+            <a:avLst/>
+          </a:prstGeom>
+          <a:noFill/>
+        </p:spPr>
+        <p:txBody>
+          <a:bodyPr wrap="none">
+            <a:spAutoFit/>
+          </a:bodyPr>
+          <a:lstStyle/>
+          <a:p>
+            <a:pPr algn="l">
+              <a:spcAft>
+                <a:spcPts val="0"/>
+              </a:spcAft>
+            </a:pPr>
+            <a:r>
+              <a:rPr sz="1100" b="0">
+                <a:solidFill>
+                  <a:srgbClr val="7D7767"/>
+                </a:solidFill>
+                <a:latin typeface="IBM Plex Mono"/>
+              </a:rPr>
+              <a:t>Held at 77.9% accuracy on purpose — see next slide</a:t>
+            </a:r>
+          </a:p>
+        </p:txBody>
+      </p:sp>
+      <p:sp>
+        <p:nvSpPr>
+          <p:cNvPr id="13" name="TextBox 12"/>
           <p:cNvSpPr txBox="1"/>
           <p:nvPr/>
         </p:nvSpPr>
@@ -5599,7 +5616,7 @@
                 </a:solidFill>
                 <a:latin typeface="IBM Plex Mono"/>
               </a:rPr>
-              <a:t>THE LOOP</a:t>
+              <a:t>THE DATA</a:t>
             </a:r>
           </a:p>
         </p:txBody>
@@ -5638,7 +5655,7 @@
                 </a:solidFill>
                 <a:latin typeface="Newsreader"/>
               </a:rPr>
-              <a:t>Honest about self-improvement</a:t>
+              <a:t>No, the data is not real. It cannot be.</a:t>
             </a:r>
           </a:p>
         </p:txBody>
@@ -5712,7 +5729,7 @@
                 </a:solidFill>
                 <a:latin typeface="IBM Plex Sans"/>
               </a:rPr>
-              <a:t>When staff disagree, one click logs the correction as a labelled</a:t>
+              <a:t>No public dataset exists anywhere of real clinic claims paired with</a:t>
             </a:r>
           </a:p>
           <a:p>
@@ -5728,15 +5745,8 @@
                 </a:solidFill>
                 <a:latin typeface="IBM Plex Sans"/>
               </a:rPr>
-              <a:t>example. That is all it does, and we say so.</a:t>
-            </a:r>
-          </a:p>
-          <a:p>
-            <a:pPr>
-              <a:spcAft>
-                <a:spcPts val="300"/>
-              </a:spcAft>
-            </a:pPr>
+              <a:t>their outcomes. Insurers treat that as private business information.</a:t>
+            </a:r>
           </a:p>
           <a:p>
             <a:pPr>
@@ -5751,8 +5761,15 @@
                 </a:solidFill>
                 <a:latin typeface="IBM Plex Sans"/>
               </a:rPr>
-              <a:t>Real products close this loop by parsing the 835 remittance files</a:t>
-            </a:r>
+              <a:t>Every commercial product here trains on its own private history.</a:t>
+            </a:r>
+          </a:p>
+          <a:p>
+            <a:pPr>
+              <a:spcAft>
+                <a:spcPts val="300"/>
+              </a:spcAft>
+            </a:pPr>
           </a:p>
           <a:p>
             <a:pPr>
@@ -5767,7 +5784,7 @@
                 </a:solidFill>
                 <a:latin typeface="IBM Plex Sans"/>
               </a:rPr>
-              <a:t>insurers return, retraining as outcomes accumulate over weeks.</a:t>
+              <a:t>So we built ours from two real pieces:</a:t>
             </a:r>
           </a:p>
           <a:p>
@@ -5783,15 +5800,8 @@
                 </a:solidFill>
                 <a:latin typeface="IBM Plex Sans"/>
               </a:rPr>
-              <a:t>Nobody in this industry has live self-improvement.</a:t>
-            </a:r>
-          </a:p>
-          <a:p>
-            <a:pPr>
-              <a:spcAft>
-                <a:spcPts val="300"/>
-              </a:spcAft>
-            </a:pPr>
+              <a:t>     Synthea — open clinical simulator, real SNOMED CT codes</a:t>
+            </a:r>
           </a:p>
           <a:p>
             <a:pPr>
@@ -5806,8 +5816,15 @@
                 </a:solidFill>
                 <a:latin typeface="IBM Plex Sans"/>
               </a:rPr>
-              <a:t>Our architecture supports that path. The demo does not pretend to</a:t>
-            </a:r>
+              <a:t>     X12 CARC — the real industry rejection-reason standard</a:t>
+            </a:r>
+          </a:p>
+          <a:p>
+            <a:pPr>
+              <a:spcAft>
+                <a:spcPts val="300"/>
+              </a:spcAft>
+            </a:pPr>
           </a:p>
           <a:p>
             <a:pPr>
@@ -5822,7 +5839,39 @@
                 </a:solidFill>
                 <a:latin typeface="IBM Plex Sans"/>
               </a:rPr>
-              <a:t>have walked it.</a:t>
+              <a:t>Only the labelling logic is ours, and we documented exactly where</a:t>
+            </a:r>
+          </a:p>
+          <a:p>
+            <a:pPr>
+              <a:spcAft>
+                <a:spcPts val="300"/>
+              </a:spcAft>
+            </a:pPr>
+            <a:r>
+              <a:rPr sz="1500">
+                <a:solidFill>
+                  <a:srgbClr val="4A463B"/>
+                </a:solidFill>
+                <a:latin typeface="IBM Plex Sans"/>
+              </a:rPr>
+              <a:t>that line falls. A near-perfect score on self-generated data would</a:t>
+            </a:r>
+          </a:p>
+          <a:p>
+            <a:pPr>
+              <a:spcAft>
+                <a:spcPts val="300"/>
+              </a:spcAft>
+            </a:pPr>
+            <a:r>
+              <a:rPr sz="1500">
+                <a:solidFill>
+                  <a:srgbClr val="4A463B"/>
+                </a:solidFill>
+                <a:latin typeface="IBM Plex Sans"/>
+              </a:rPr>
+              <a:t>only prove the model memorised our own rules.</a:t>
             </a:r>
           </a:p>
         </p:txBody>
@@ -5830,6 +5879,45 @@
       <p:sp>
         <p:nvSpPr>
           <p:cNvPr id="6" name="TextBox 5"/>
+          <p:cNvSpPr txBox="1"/>
+          <p:nvPr/>
+        </p:nvSpPr>
+        <p:spPr>
+          <a:xfrm>
+            <a:off x="822960" y="6035040"/>
+            <a:ext cx="10515600" cy="365760"/>
+          </a:xfrm>
+          <a:prstGeom prst="rect">
+            <a:avLst/>
+          </a:prstGeom>
+          <a:noFill/>
+        </p:spPr>
+        <p:txBody>
+          <a:bodyPr wrap="none">
+            <a:spAutoFit/>
+          </a:bodyPr>
+          <a:lstStyle/>
+          <a:p>
+            <a:pPr algn="l">
+              <a:spcAft>
+                <a:spcPts val="0"/>
+              </a:spcAft>
+            </a:pPr>
+            <a:r>
+              <a:rPr sz="1100" b="0">
+                <a:solidFill>
+                  <a:srgbClr val="7D7767"/>
+                </a:solidFill>
+                <a:latin typeface="IBM Plex Mono"/>
+              </a:rPr>
+              <a:t>docs/data-provenance.md · docs/model-card.md</a:t>
+            </a:r>
+          </a:p>
+        </p:txBody>
+      </p:sp>
+      <p:sp>
+        <p:nvSpPr>
+          <p:cNvPr id="7" name="TextBox 6"/>
           <p:cNvSpPr txBox="1"/>
           <p:nvPr/>
         </p:nvSpPr>
@@ -5926,7 +6014,7 @@
                 </a:solidFill>
                 <a:latin typeface="IBM Plex Mono"/>
               </a:rPr>
-              <a:t>WHAT'S NEXT</a:t>
+              <a:t>THE LOOP</a:t>
             </a:r>
           </a:p>
         </p:txBody>
@@ -5965,7 +6053,7 @@
                 </a:solidFill>
                 <a:latin typeface="Newsreader"/>
               </a:rPr>
-              <a:t>What production would need</a:t>
+              <a:t>Honest about self-improvement</a:t>
             </a:r>
           </a:p>
         </p:txBody>
@@ -6039,7 +6127,7 @@
                 </a:solidFill>
                 <a:latin typeface="IBM Plex Sans"/>
               </a:rPr>
-              <a:t>1.  Real historical claims with real adjudication outcomes, from a</a:t>
+              <a:t>When staff disagree, one click logs the correction as a labelled</a:t>
             </a:r>
           </a:p>
           <a:p>
@@ -6055,8 +6143,15 @@
                 </a:solidFill>
                 <a:latin typeface="IBM Plex Sans"/>
               </a:rPr>
-              <a:t>     partner clinic or TPA</a:t>
-            </a:r>
+              <a:t>example. That is all it does, and we say so.</a:t>
+            </a:r>
+          </a:p>
+          <a:p>
+            <a:pPr>
+              <a:spcAft>
+                <a:spcPts val="300"/>
+              </a:spcAft>
+            </a:pPr>
           </a:p>
           <a:p>
             <a:pPr>
@@ -6071,7 +6166,7 @@
                 </a:solidFill>
                 <a:latin typeface="IBM Plex Sans"/>
               </a:rPr>
-              <a:t>2.  Parsed 835 remittance advice, for the codes insurers actually sent</a:t>
+              <a:t>Real products close this loop by parsing the 835 remittance files</a:t>
             </a:r>
           </a:p>
           <a:p>
@@ -6087,7 +6182,7 @@
                 </a:solidFill>
                 <a:latin typeface="IBM Plex Sans"/>
               </a:rPr>
-              <a:t>3.  Retraining as outcomes accumulate, with human corrections as labels</a:t>
+              <a:t>insurers return, retraining as outcomes accumulate over weeks.</a:t>
             </a:r>
           </a:p>
           <a:p>
@@ -6103,7 +6198,7 @@
                 </a:solidFill>
                 <a:latin typeface="IBM Plex Sans"/>
               </a:rPr>
-              <a:t>4.  Per-insurer models — filing rules and tariffs differ by payer</a:t>
+              <a:t>Nobody in this industry has live self-improvement.</a:t>
             </a:r>
           </a:p>
           <a:p>
@@ -6126,7 +6221,23 @@
                 </a:solidFill>
                 <a:latin typeface="IBM Plex Sans"/>
               </a:rPr>
-              <a:t>The system supports all four. It cannot access the data they need.</a:t>
+              <a:t>Our architecture supports that path. The demo does not pretend to</a:t>
+            </a:r>
+          </a:p>
+          <a:p>
+            <a:pPr>
+              <a:spcAft>
+                <a:spcPts val="300"/>
+              </a:spcAft>
+            </a:pPr>
+            <a:r>
+              <a:rPr sz="1500">
+                <a:solidFill>
+                  <a:srgbClr val="4A463B"/>
+                </a:solidFill>
+                <a:latin typeface="IBM Plex Sans"/>
+              </a:rPr>
+              <a:t>have walked it.</a:t>
             </a:r>
           </a:p>
         </p:txBody>
@@ -6139,8 +6250,8 @@
         </p:nvSpPr>
         <p:spPr>
           <a:xfrm>
-            <a:off x="822960" y="6035040"/>
-            <a:ext cx="10515600" cy="365760"/>
+            <a:off x="11247120" y="6035040"/>
+            <a:ext cx="548640" cy="365760"/>
           </a:xfrm>
           <a:prstGeom prst="rect">
             <a:avLst/>
@@ -6165,21 +6276,47 @@
                 </a:solidFill>
                 <a:latin typeface="IBM Plex Mono"/>
               </a:rPr>
-              <a:t>Python · LightGBM · SHAP · FastAPI · Next.js · Qwen on DashScope · Alibaba Cloud ECS</a:t>
-            </a:r>
-          </a:p>
-        </p:txBody>
-      </p:sp>
-      <p:sp>
-        <p:nvSpPr>
-          <p:cNvPr id="7" name="TextBox 6"/>
+              <a:t>8</a:t>
+            </a:r>
+          </a:p>
+        </p:txBody>
+      </p:sp>
+    </p:spTree>
+  </p:cSld>
+  <p:clrMapOvr>
+    <a:masterClrMapping/>
+  </p:clrMapOvr>
+</p:sld>
+</file>
+
+<file path=ppt/slides/slide9.xml><?xml version="1.0" encoding="utf-8"?>
+<p:sld xmlns:a="http://schemas.openxmlformats.org/drawingml/2006/main" xmlns:p="http://schemas.openxmlformats.org/presentationml/2006/main" xmlns:r="http://schemas.openxmlformats.org/officeDocument/2006/relationships">
+  <p:cSld>
+    <p:bg>
+      <p:bgPr>
+        <a:solidFill>
+          <a:srgbClr val="FAF9F6"/>
+        </a:solidFill>
+        <a:effectLst/>
+      </p:bgPr>
+    </p:bg>
+    <p:spTree>
+      <p:nvGrpSpPr>
+        <p:cNvPr id="1" name=""/>
+        <p:cNvGrpSpPr/>
+        <p:nvPr/>
+      </p:nvGrpSpPr>
+      <p:grpSpPr/>
+      <p:sp>
+        <p:nvSpPr>
+          <p:cNvPr id="2" name="TextBox 1"/>
           <p:cNvSpPr txBox="1"/>
           <p:nvPr/>
         </p:nvSpPr>
         <p:spPr>
           <a:xfrm>
-            <a:off x="11247120" y="6035040"/>
-            <a:ext cx="548640" cy="365760"/>
+            <a:off x="822960" y="594360"/>
+            <a:ext cx="10058400" cy="274320"/>
           </a:xfrm>
           <a:prstGeom prst="rect">
             <a:avLst/>
@@ -6204,7 +6341,285 @@
                 </a:solidFill>
                 <a:latin typeface="IBM Plex Mono"/>
               </a:rPr>
-              <a:t>8</a:t>
+              <a:t>WHAT'S NEXT</a:t>
+            </a:r>
+          </a:p>
+        </p:txBody>
+      </p:sp>
+      <p:sp>
+        <p:nvSpPr>
+          <p:cNvPr id="3" name="TextBox 2"/>
+          <p:cNvSpPr txBox="1"/>
+          <p:nvPr/>
+        </p:nvSpPr>
+        <p:spPr>
+          <a:xfrm>
+            <a:off x="777240" y="960120"/>
+            <a:ext cx="10607040" cy="914400"/>
+          </a:xfrm>
+          <a:prstGeom prst="rect">
+            <a:avLst/>
+          </a:prstGeom>
+          <a:noFill/>
+        </p:spPr>
+        <p:txBody>
+          <a:bodyPr wrap="none">
+            <a:spAutoFit/>
+          </a:bodyPr>
+          <a:lstStyle/>
+          <a:p>
+            <a:pPr algn="l">
+              <a:spcAft>
+                <a:spcPts val="0"/>
+              </a:spcAft>
+            </a:pPr>
+            <a:r>
+              <a:rPr sz="3000" b="0">
+                <a:solidFill>
+                  <a:srgbClr val="17150F"/>
+                </a:solidFill>
+                <a:latin typeface="Newsreader"/>
+              </a:rPr>
+              <a:t>What production would need</a:t>
+            </a:r>
+          </a:p>
+        </p:txBody>
+      </p:sp>
+      <p:cxnSp>
+        <p:nvCxnSpPr>
+          <p:cNvPr id="4" name="Connector 3"/>
+          <p:cNvCxnSpPr/>
+          <p:nvPr/>
+        </p:nvCxnSpPr>
+        <p:spPr>
+          <a:xfrm>
+            <a:off x="822960" y="1965960"/>
+            <a:ext cx="10515600" cy="0"/>
+          </a:xfrm>
+          <a:prstGeom prst="line">
+            <a:avLst/>
+          </a:prstGeom>
+          <a:ln w="9525">
+            <a:solidFill>
+              <a:srgbClr val="E2DED2"/>
+            </a:solidFill>
+          </a:ln>
+        </p:spPr>
+        <p:style>
+          <a:lnRef idx="2">
+            <a:schemeClr val="accent1"/>
+          </a:lnRef>
+          <a:fillRef idx="0">
+            <a:schemeClr val="accent1"/>
+          </a:fillRef>
+          <a:effectRef idx="1">
+            <a:schemeClr val="accent1"/>
+          </a:effectRef>
+          <a:fontRef idx="minor">
+            <a:schemeClr val="tx1"/>
+          </a:fontRef>
+        </p:style>
+      </p:cxnSp>
+      <p:sp>
+        <p:nvSpPr>
+          <p:cNvPr id="5" name="TextBox 4"/>
+          <p:cNvSpPr txBox="1"/>
+          <p:nvPr/>
+        </p:nvSpPr>
+        <p:spPr>
+          <a:xfrm>
+            <a:off x="822960" y="2286000"/>
+            <a:ext cx="6949440" cy="3291840"/>
+          </a:xfrm>
+          <a:prstGeom prst="rect">
+            <a:avLst/>
+          </a:prstGeom>
+          <a:noFill/>
+        </p:spPr>
+        <p:txBody>
+          <a:bodyPr wrap="square">
+            <a:spAutoFit/>
+          </a:bodyPr>
+          <a:lstStyle/>
+          <a:p>
+            <a:pPr>
+              <a:spcAft>
+                <a:spcPts val="300"/>
+              </a:spcAft>
+            </a:pPr>
+            <a:r>
+              <a:rPr sz="1500">
+                <a:solidFill>
+                  <a:srgbClr val="4A463B"/>
+                </a:solidFill>
+                <a:latin typeface="IBM Plex Sans"/>
+              </a:rPr>
+              <a:t>1.  Real historical claims with real adjudication outcomes, from a</a:t>
+            </a:r>
+          </a:p>
+          <a:p>
+            <a:pPr>
+              <a:spcAft>
+                <a:spcPts val="300"/>
+              </a:spcAft>
+            </a:pPr>
+            <a:r>
+              <a:rPr sz="1500">
+                <a:solidFill>
+                  <a:srgbClr val="4A463B"/>
+                </a:solidFill>
+                <a:latin typeface="IBM Plex Sans"/>
+              </a:rPr>
+              <a:t>     partner clinic or TPA</a:t>
+            </a:r>
+          </a:p>
+          <a:p>
+            <a:pPr>
+              <a:spcAft>
+                <a:spcPts val="300"/>
+              </a:spcAft>
+            </a:pPr>
+            <a:r>
+              <a:rPr sz="1500">
+                <a:solidFill>
+                  <a:srgbClr val="4A463B"/>
+                </a:solidFill>
+                <a:latin typeface="IBM Plex Sans"/>
+              </a:rPr>
+              <a:t>2.  Parsed 835 remittance advice, for the codes insurers actually sent</a:t>
+            </a:r>
+          </a:p>
+          <a:p>
+            <a:pPr>
+              <a:spcAft>
+                <a:spcPts val="300"/>
+              </a:spcAft>
+            </a:pPr>
+            <a:r>
+              <a:rPr sz="1500">
+                <a:solidFill>
+                  <a:srgbClr val="4A463B"/>
+                </a:solidFill>
+                <a:latin typeface="IBM Plex Sans"/>
+              </a:rPr>
+              <a:t>3.  Retraining as outcomes accumulate, with human corrections as labels</a:t>
+            </a:r>
+          </a:p>
+          <a:p>
+            <a:pPr>
+              <a:spcAft>
+                <a:spcPts val="300"/>
+              </a:spcAft>
+            </a:pPr>
+            <a:r>
+              <a:rPr sz="1500">
+                <a:solidFill>
+                  <a:srgbClr val="4A463B"/>
+                </a:solidFill>
+                <a:latin typeface="IBM Plex Sans"/>
+              </a:rPr>
+              <a:t>4.  Per-insurer models — filing rules and tariffs differ by payer</a:t>
+            </a:r>
+          </a:p>
+          <a:p>
+            <a:pPr>
+              <a:spcAft>
+                <a:spcPts val="300"/>
+              </a:spcAft>
+            </a:pPr>
+          </a:p>
+          <a:p>
+            <a:pPr>
+              <a:spcAft>
+                <a:spcPts val="300"/>
+              </a:spcAft>
+            </a:pPr>
+            <a:r>
+              <a:rPr sz="1500">
+                <a:solidFill>
+                  <a:srgbClr val="4A463B"/>
+                </a:solidFill>
+                <a:latin typeface="IBM Plex Sans"/>
+              </a:rPr>
+              <a:t>The system supports all four. It cannot access the data they need.</a:t>
+            </a:r>
+          </a:p>
+        </p:txBody>
+      </p:sp>
+      <p:sp>
+        <p:nvSpPr>
+          <p:cNvPr id="6" name="TextBox 5"/>
+          <p:cNvSpPr txBox="1"/>
+          <p:nvPr/>
+        </p:nvSpPr>
+        <p:spPr>
+          <a:xfrm>
+            <a:off x="822960" y="6035040"/>
+            <a:ext cx="10515600" cy="365760"/>
+          </a:xfrm>
+          <a:prstGeom prst="rect">
+            <a:avLst/>
+          </a:prstGeom>
+          <a:noFill/>
+        </p:spPr>
+        <p:txBody>
+          <a:bodyPr wrap="none">
+            <a:spAutoFit/>
+          </a:bodyPr>
+          <a:lstStyle/>
+          <a:p>
+            <a:pPr algn="l">
+              <a:spcAft>
+                <a:spcPts val="0"/>
+              </a:spcAft>
+            </a:pPr>
+            <a:r>
+              <a:rPr sz="1100" b="0">
+                <a:solidFill>
+                  <a:srgbClr val="7D7767"/>
+                </a:solidFill>
+                <a:latin typeface="IBM Plex Mono"/>
+              </a:rPr>
+              <a:t>Python · LightGBM · SHAP · FastAPI · Next.js · Qwen on DashScope · containerised, ECS runbook</a:t>
+            </a:r>
+          </a:p>
+        </p:txBody>
+      </p:sp>
+      <p:sp>
+        <p:nvSpPr>
+          <p:cNvPr id="7" name="TextBox 6"/>
+          <p:cNvSpPr txBox="1"/>
+          <p:nvPr/>
+        </p:nvSpPr>
+        <p:spPr>
+          <a:xfrm>
+            <a:off x="11247120" y="6035040"/>
+            <a:ext cx="548640" cy="365760"/>
+          </a:xfrm>
+          <a:prstGeom prst="rect">
+            <a:avLst/>
+          </a:prstGeom>
+          <a:noFill/>
+        </p:spPr>
+        <p:txBody>
+          <a:bodyPr wrap="none">
+            <a:spAutoFit/>
+          </a:bodyPr>
+          <a:lstStyle/>
+          <a:p>
+            <a:pPr algn="l">
+              <a:spcAft>
+                <a:spcPts val="0"/>
+              </a:spcAft>
+            </a:pPr>
+            <a:r>
+              <a:rPr sz="1100" b="0">
+                <a:solidFill>
+                  <a:srgbClr val="7D7767"/>
+                </a:solidFill>
+                <a:latin typeface="IBM Plex Mono"/>
+              </a:rPr>
+              <a:t>9</a:t>
             </a:r>
           </a:p>
         </p:txBody>

--- a/docs/deck.pptx
+++ b/docs/deck.pptx
@@ -3322,7 +3322,7 @@
                 </a:solidFill>
                 <a:latin typeface="IBM Plex Mono"/>
               </a:rPr>
-              <a:t>Mirza Ahsan Baig and Safee · LightGBM + SHAP + Qwen on DashScope</a:t>
+              <a:t>Mirza Ahsan Baig and Safee Akmal · LightGBM + SHAP + Qwen on DashScope</a:t>
             </a:r>
           </a:p>
         </p:txBody>
